--- a/watertap/distr_water_treatment/information_flows.pptx
+++ b/watertap/distr_water_treatment/information_flows.pptx
@@ -104,6 +104,11 @@
       </a:defRPr>
     </a:lvl9pPr>
   </p:defaultTextStyle>
+  <p:extLst>
+    <p:ext uri="{EFAFB233-063F-42B5-8137-9DF3F51BA10A}">
+      <p15:sldGuideLst xmlns:p15="http://schemas.microsoft.com/office/powerpoint/2012/main"/>
+    </p:ext>
+  </p:extLst>
 </p:presentation>
 </file>
 
@@ -3420,7 +3425,7 @@
         </p:nvSpPr>
         <p:spPr>
           <a:xfrm>
-            <a:off x="896112" y="3822716"/>
+            <a:off x="896112" y="3767852"/>
             <a:ext cx="2103120" cy="512064"/>
           </a:xfrm>
           <a:prstGeom prst="rect">
@@ -3469,8 +3474,8 @@
         </p:nvSpPr>
         <p:spPr>
           <a:xfrm>
-            <a:off x="896112" y="4515874"/>
-            <a:ext cx="2103120" cy="624316"/>
+            <a:off x="896112" y="4363436"/>
+            <a:ext cx="2103120" cy="986608"/>
           </a:xfrm>
           <a:prstGeom prst="rect">
             <a:avLst/>
@@ -3506,10 +3511,10 @@
       </p:sp>
       <p:sp>
         <p:nvSpPr>
-          <p:cNvPr id="7" name="Rectangle 6">
-            <a:extLst>
-              <a:ext uri="{FF2B5EF4-FFF2-40B4-BE49-F238E27FC236}">
-                <a16:creationId xmlns:a16="http://schemas.microsoft.com/office/drawing/2014/main" id="{752BFF38-2C64-F048-A443-ED0B985284E7}"/>
+          <p:cNvPr id="24" name="Flowchart: Connector 23">
+            <a:extLst>
+              <a:ext uri="{FF2B5EF4-FFF2-40B4-BE49-F238E27FC236}">
+                <a16:creationId xmlns:a16="http://schemas.microsoft.com/office/drawing/2014/main" id="{B73A26F5-9C4C-87D3-8AB4-703700D27604}"/>
               </a:ext>
             </a:extLst>
           </p:cNvPr>
@@ -3518,368 +3523,8 @@
         </p:nvSpPr>
         <p:spPr>
           <a:xfrm>
-            <a:off x="3776472" y="3759232"/>
-            <a:ext cx="2103120" cy="624316"/>
-          </a:xfrm>
-          <a:prstGeom prst="rect">
-            <a:avLst/>
-          </a:prstGeom>
-        </p:spPr>
-        <p:style>
-          <a:lnRef idx="2">
-            <a:schemeClr val="accent1">
-              <a:shade val="15000"/>
-            </a:schemeClr>
-          </a:lnRef>
-          <a:fillRef idx="1">
-            <a:schemeClr val="accent1"/>
-          </a:fillRef>
-          <a:effectRef idx="0">
-            <a:schemeClr val="accent1"/>
-          </a:effectRef>
-          <a:fontRef idx="minor">
-            <a:schemeClr val="lt1"/>
-          </a:fontRef>
-        </p:style>
-        <p:txBody>
-          <a:bodyPr rtlCol="0" anchor="ctr"/>
-          <a:lstStyle/>
-          <a:p>
-            <a:pPr algn="ctr"/>
-            <a:r>
-              <a:rPr lang="en-US" dirty="0"/>
-              <a:t>CAPEX, OPEX</a:t>
-            </a:r>
-          </a:p>
-        </p:txBody>
-      </p:sp>
-      <p:sp>
-        <p:nvSpPr>
-          <p:cNvPr id="8" name="Rectangle 7">
-            <a:extLst>
-              <a:ext uri="{FF2B5EF4-FFF2-40B4-BE49-F238E27FC236}">
-                <a16:creationId xmlns:a16="http://schemas.microsoft.com/office/drawing/2014/main" id="{92700539-3F7F-BB10-8D63-FFB88FFA7F1F}"/>
-              </a:ext>
-            </a:extLst>
-          </p:cNvPr>
-          <p:cNvSpPr/>
-          <p:nvPr/>
-        </p:nvSpPr>
-        <p:spPr>
-          <a:xfrm>
-            <a:off x="3666744" y="5120640"/>
-            <a:ext cx="2103120" cy="624316"/>
-          </a:xfrm>
-          <a:prstGeom prst="rect">
-            <a:avLst/>
-          </a:prstGeom>
-        </p:spPr>
-        <p:style>
-          <a:lnRef idx="2">
-            <a:schemeClr val="accent1">
-              <a:shade val="15000"/>
-            </a:schemeClr>
-          </a:lnRef>
-          <a:fillRef idx="1">
-            <a:schemeClr val="accent1"/>
-          </a:fillRef>
-          <a:effectRef idx="0">
-            <a:schemeClr val="accent1"/>
-          </a:effectRef>
-          <a:fontRef idx="minor">
-            <a:schemeClr val="lt1"/>
-          </a:fontRef>
-        </p:style>
-        <p:txBody>
-          <a:bodyPr rtlCol="0" anchor="ctr"/>
-          <a:lstStyle/>
-          <a:p>
-            <a:pPr algn="ctr"/>
-            <a:r>
-              <a:rPr lang="en-US" dirty="0"/>
-              <a:t>Energy Profile</a:t>
-            </a:r>
-          </a:p>
-        </p:txBody>
-      </p:sp>
-      <p:sp>
-        <p:nvSpPr>
-          <p:cNvPr id="9" name="Rectangle 8">
-            <a:extLst>
-              <a:ext uri="{FF2B5EF4-FFF2-40B4-BE49-F238E27FC236}">
-                <a16:creationId xmlns:a16="http://schemas.microsoft.com/office/drawing/2014/main" id="{BE4C68B6-723D-6DA2-E985-1E94762F0119}"/>
-              </a:ext>
-            </a:extLst>
-          </p:cNvPr>
-          <p:cNvSpPr/>
-          <p:nvPr/>
-        </p:nvSpPr>
-        <p:spPr>
-          <a:xfrm>
-            <a:off x="3666744" y="2540401"/>
-            <a:ext cx="2103120" cy="624316"/>
-          </a:xfrm>
-          <a:prstGeom prst="rect">
-            <a:avLst/>
-          </a:prstGeom>
-        </p:spPr>
-        <p:style>
-          <a:lnRef idx="2">
-            <a:schemeClr val="accent1">
-              <a:shade val="15000"/>
-            </a:schemeClr>
-          </a:lnRef>
-          <a:fillRef idx="1">
-            <a:schemeClr val="accent1"/>
-          </a:fillRef>
-          <a:effectRef idx="0">
-            <a:schemeClr val="accent1"/>
-          </a:effectRef>
-          <a:fontRef idx="minor">
-            <a:schemeClr val="lt1"/>
-          </a:fontRef>
-        </p:style>
-        <p:txBody>
-          <a:bodyPr rtlCol="0" anchor="ctr"/>
-          <a:lstStyle/>
-          <a:p>
-            <a:pPr algn="ctr"/>
-            <a:r>
-              <a:rPr lang="en-US" dirty="0"/>
-              <a:t>Treatment SEC</a:t>
-            </a:r>
-          </a:p>
-        </p:txBody>
-      </p:sp>
-      <p:cxnSp>
-        <p:nvCxnSpPr>
-          <p:cNvPr id="11" name="Straight Arrow Connector 10">
-            <a:extLst>
-              <a:ext uri="{FF2B5EF4-FFF2-40B4-BE49-F238E27FC236}">
-                <a16:creationId xmlns:a16="http://schemas.microsoft.com/office/drawing/2014/main" id="{7FA9A7C7-01C8-FB5F-DEEA-AABF79EEC7DC}"/>
-              </a:ext>
-            </a:extLst>
-          </p:cNvPr>
-          <p:cNvCxnSpPr>
-            <a:endCxn id="8" idx="1"/>
-          </p:cNvCxnSpPr>
-          <p:nvPr/>
-        </p:nvCxnSpPr>
-        <p:spPr>
-          <a:xfrm>
-            <a:off x="2999232" y="4828032"/>
-            <a:ext cx="667512" cy="604766"/>
-          </a:xfrm>
-          <a:prstGeom prst="straightConnector1">
-            <a:avLst/>
-          </a:prstGeom>
-          <a:ln>
-            <a:tailEnd type="triangle"/>
-          </a:ln>
-        </p:spPr>
-        <p:style>
-          <a:lnRef idx="2">
-            <a:schemeClr val="accent2"/>
-          </a:lnRef>
-          <a:fillRef idx="0">
-            <a:schemeClr val="accent2"/>
-          </a:fillRef>
-          <a:effectRef idx="1">
-            <a:schemeClr val="accent2"/>
-          </a:effectRef>
-          <a:fontRef idx="minor">
-            <a:schemeClr val="tx1"/>
-          </a:fontRef>
-        </p:style>
-      </p:cxnSp>
-      <p:cxnSp>
-        <p:nvCxnSpPr>
-          <p:cNvPr id="12" name="Straight Arrow Connector 11">
-            <a:extLst>
-              <a:ext uri="{FF2B5EF4-FFF2-40B4-BE49-F238E27FC236}">
-                <a16:creationId xmlns:a16="http://schemas.microsoft.com/office/drawing/2014/main" id="{26775C53-8FFA-A939-E9AE-14DB8FC98D64}"/>
-              </a:ext>
-            </a:extLst>
-          </p:cNvPr>
-          <p:cNvCxnSpPr>
-            <a:cxnSpLocks/>
-            <a:stCxn id="3" idx="3"/>
-            <a:endCxn id="9" idx="1"/>
-          </p:cNvCxnSpPr>
-          <p:nvPr/>
-        </p:nvCxnSpPr>
-        <p:spPr>
-          <a:xfrm flipV="1">
-            <a:off x="2999232" y="2852559"/>
-            <a:ext cx="667512" cy="570869"/>
-          </a:xfrm>
-          <a:prstGeom prst="straightConnector1">
-            <a:avLst/>
-          </a:prstGeom>
-          <a:ln>
-            <a:tailEnd type="triangle"/>
-          </a:ln>
-        </p:spPr>
-        <p:style>
-          <a:lnRef idx="2">
-            <a:schemeClr val="accent2"/>
-          </a:lnRef>
-          <a:fillRef idx="0">
-            <a:schemeClr val="accent2"/>
-          </a:fillRef>
-          <a:effectRef idx="1">
-            <a:schemeClr val="accent2"/>
-          </a:effectRef>
-          <a:fontRef idx="minor">
-            <a:schemeClr val="tx1"/>
-          </a:fontRef>
-        </p:style>
-      </p:cxnSp>
-      <p:cxnSp>
-        <p:nvCxnSpPr>
-          <p:cNvPr id="15" name="Straight Arrow Connector 14">
-            <a:extLst>
-              <a:ext uri="{FF2B5EF4-FFF2-40B4-BE49-F238E27FC236}">
-                <a16:creationId xmlns:a16="http://schemas.microsoft.com/office/drawing/2014/main" id="{9C52725D-D056-24CF-3F87-864DD48CDE1A}"/>
-              </a:ext>
-            </a:extLst>
-          </p:cNvPr>
-          <p:cNvCxnSpPr>
-            <a:cxnSpLocks/>
-            <a:stCxn id="3" idx="3"/>
-            <a:endCxn id="7" idx="1"/>
-          </p:cNvCxnSpPr>
-          <p:nvPr/>
-        </p:nvCxnSpPr>
-        <p:spPr>
-          <a:xfrm>
-            <a:off x="2999232" y="3423428"/>
-            <a:ext cx="777240" cy="647962"/>
-          </a:xfrm>
-          <a:prstGeom prst="straightConnector1">
-            <a:avLst/>
-          </a:prstGeom>
-          <a:ln>
-            <a:tailEnd type="triangle"/>
-          </a:ln>
-        </p:spPr>
-        <p:style>
-          <a:lnRef idx="2">
-            <a:schemeClr val="accent2"/>
-          </a:lnRef>
-          <a:fillRef idx="0">
-            <a:schemeClr val="accent2"/>
-          </a:fillRef>
-          <a:effectRef idx="1">
-            <a:schemeClr val="accent2"/>
-          </a:effectRef>
-          <a:fontRef idx="minor">
-            <a:schemeClr val="tx1"/>
-          </a:fontRef>
-        </p:style>
-      </p:cxnSp>
-      <p:cxnSp>
-        <p:nvCxnSpPr>
-          <p:cNvPr id="18" name="Straight Arrow Connector 17">
-            <a:extLst>
-              <a:ext uri="{FF2B5EF4-FFF2-40B4-BE49-F238E27FC236}">
-                <a16:creationId xmlns:a16="http://schemas.microsoft.com/office/drawing/2014/main" id="{F964D0B5-3980-7274-14ED-E1B67F917891}"/>
-              </a:ext>
-            </a:extLst>
-          </p:cNvPr>
-          <p:cNvCxnSpPr>
-            <a:cxnSpLocks/>
-            <a:stCxn id="4" idx="3"/>
-            <a:endCxn id="7" idx="1"/>
-          </p:cNvCxnSpPr>
-          <p:nvPr/>
-        </p:nvCxnSpPr>
-        <p:spPr>
-          <a:xfrm flipV="1">
-            <a:off x="2999232" y="4071390"/>
-            <a:ext cx="777240" cy="7358"/>
-          </a:xfrm>
-          <a:prstGeom prst="straightConnector1">
-            <a:avLst/>
-          </a:prstGeom>
-          <a:ln>
-            <a:tailEnd type="triangle"/>
-          </a:ln>
-        </p:spPr>
-        <p:style>
-          <a:lnRef idx="2">
-            <a:schemeClr val="accent2"/>
-          </a:lnRef>
-          <a:fillRef idx="0">
-            <a:schemeClr val="accent2"/>
-          </a:fillRef>
-          <a:effectRef idx="1">
-            <a:schemeClr val="accent2"/>
-          </a:effectRef>
-          <a:fontRef idx="minor">
-            <a:schemeClr val="tx1"/>
-          </a:fontRef>
-        </p:style>
-      </p:cxnSp>
-      <p:cxnSp>
-        <p:nvCxnSpPr>
-          <p:cNvPr id="21" name="Straight Arrow Connector 20">
-            <a:extLst>
-              <a:ext uri="{FF2B5EF4-FFF2-40B4-BE49-F238E27FC236}">
-                <a16:creationId xmlns:a16="http://schemas.microsoft.com/office/drawing/2014/main" id="{E7D5D1E0-0503-3476-8F46-8B39884E6860}"/>
-              </a:ext>
-            </a:extLst>
-          </p:cNvPr>
-          <p:cNvCxnSpPr>
-            <a:cxnSpLocks/>
-            <a:stCxn id="5" idx="3"/>
-            <a:endCxn id="7" idx="1"/>
-          </p:cNvCxnSpPr>
-          <p:nvPr/>
-        </p:nvCxnSpPr>
-        <p:spPr>
-          <a:xfrm flipV="1">
-            <a:off x="2999232" y="4071390"/>
-            <a:ext cx="777240" cy="756642"/>
-          </a:xfrm>
-          <a:prstGeom prst="straightConnector1">
-            <a:avLst/>
-          </a:prstGeom>
-          <a:ln>
-            <a:tailEnd type="triangle"/>
-          </a:ln>
-        </p:spPr>
-        <p:style>
-          <a:lnRef idx="2">
-            <a:schemeClr val="accent2"/>
-          </a:lnRef>
-          <a:fillRef idx="0">
-            <a:schemeClr val="accent2"/>
-          </a:fillRef>
-          <a:effectRef idx="1">
-            <a:schemeClr val="accent2"/>
-          </a:effectRef>
-          <a:fontRef idx="minor">
-            <a:schemeClr val="tx1"/>
-          </a:fontRef>
-        </p:style>
-      </p:cxnSp>
-      <p:sp>
-        <p:nvSpPr>
-          <p:cNvPr id="24" name="Flowchart: Connector 23">
-            <a:extLst>
-              <a:ext uri="{FF2B5EF4-FFF2-40B4-BE49-F238E27FC236}">
-                <a16:creationId xmlns:a16="http://schemas.microsoft.com/office/drawing/2014/main" id="{B73A26F5-9C4C-87D3-8AB4-703700D27604}"/>
-              </a:ext>
-            </a:extLst>
-          </p:cNvPr>
-          <p:cNvSpPr/>
-          <p:nvPr/>
-        </p:nvSpPr>
-        <p:spPr>
-          <a:xfrm>
-            <a:off x="6574536" y="2269512"/>
-            <a:ext cx="2103120" cy="1005840"/>
+            <a:off x="6601968" y="948314"/>
+            <a:ext cx="2103120" cy="4225529"/>
           </a:xfrm>
           <a:prstGeom prst="flowChartConnector">
             <a:avLst/>
@@ -3927,7 +3572,7 @@
         </p:nvSpPr>
         <p:spPr>
           <a:xfrm>
-            <a:off x="896112" y="1324249"/>
+            <a:off x="896112" y="1222956"/>
             <a:ext cx="2103120" cy="512064"/>
           </a:xfrm>
           <a:prstGeom prst="rect">
@@ -3962,319 +3607,6 @@
           </a:p>
         </p:txBody>
       </p:sp>
-      <p:sp>
-        <p:nvSpPr>
-          <p:cNvPr id="27" name="Rectangle 26">
-            <a:extLst>
-              <a:ext uri="{FF2B5EF4-FFF2-40B4-BE49-F238E27FC236}">
-                <a16:creationId xmlns:a16="http://schemas.microsoft.com/office/drawing/2014/main" id="{107EE2D8-84A4-A7CD-338F-3BDABFCF8269}"/>
-              </a:ext>
-            </a:extLst>
-          </p:cNvPr>
-          <p:cNvSpPr/>
-          <p:nvPr/>
-        </p:nvSpPr>
-        <p:spPr>
-          <a:xfrm>
-            <a:off x="3776472" y="1235381"/>
-            <a:ext cx="2103120" cy="624316"/>
-          </a:xfrm>
-          <a:prstGeom prst="rect">
-            <a:avLst/>
-          </a:prstGeom>
-        </p:spPr>
-        <p:style>
-          <a:lnRef idx="2">
-            <a:schemeClr val="accent1">
-              <a:shade val="15000"/>
-            </a:schemeClr>
-          </a:lnRef>
-          <a:fillRef idx="1">
-            <a:schemeClr val="accent1"/>
-          </a:fillRef>
-          <a:effectRef idx="0">
-            <a:schemeClr val="accent1"/>
-          </a:effectRef>
-          <a:fontRef idx="minor">
-            <a:schemeClr val="lt1"/>
-          </a:fontRef>
-        </p:style>
-        <p:txBody>
-          <a:bodyPr rtlCol="0" anchor="ctr"/>
-          <a:lstStyle/>
-          <a:p>
-            <a:pPr algn="ctr"/>
-            <a:r>
-              <a:rPr lang="en-US" dirty="0"/>
-              <a:t>Water Demand</a:t>
-            </a:r>
-          </a:p>
-        </p:txBody>
-      </p:sp>
-      <p:sp>
-        <p:nvSpPr>
-          <p:cNvPr id="28" name="Rectangle 27">
-            <a:extLst>
-              <a:ext uri="{FF2B5EF4-FFF2-40B4-BE49-F238E27FC236}">
-                <a16:creationId xmlns:a16="http://schemas.microsoft.com/office/drawing/2014/main" id="{A5B91F4E-EA89-1E21-79FC-54F68EE5226A}"/>
-              </a:ext>
-            </a:extLst>
-          </p:cNvPr>
-          <p:cNvSpPr/>
-          <p:nvPr/>
-        </p:nvSpPr>
-        <p:spPr>
-          <a:xfrm>
-            <a:off x="896112" y="2204597"/>
-            <a:ext cx="2103120" cy="512064"/>
-          </a:xfrm>
-          <a:prstGeom prst="rect">
-            <a:avLst/>
-          </a:prstGeom>
-        </p:spPr>
-        <p:style>
-          <a:lnRef idx="2">
-            <a:schemeClr val="accent1">
-              <a:shade val="15000"/>
-            </a:schemeClr>
-          </a:lnRef>
-          <a:fillRef idx="1">
-            <a:schemeClr val="accent1"/>
-          </a:fillRef>
-          <a:effectRef idx="0">
-            <a:schemeClr val="accent1"/>
-          </a:effectRef>
-          <a:fontRef idx="minor">
-            <a:schemeClr val="lt1"/>
-          </a:fontRef>
-        </p:style>
-        <p:txBody>
-          <a:bodyPr rtlCol="0" anchor="ctr"/>
-          <a:lstStyle/>
-          <a:p>
-            <a:pPr algn="ctr"/>
-            <a:r>
-              <a:rPr lang="en-US" dirty="0"/>
-              <a:t>Water Quality</a:t>
-            </a:r>
-          </a:p>
-        </p:txBody>
-      </p:sp>
-      <p:cxnSp>
-        <p:nvCxnSpPr>
-          <p:cNvPr id="29" name="Straight Arrow Connector 28">
-            <a:extLst>
-              <a:ext uri="{FF2B5EF4-FFF2-40B4-BE49-F238E27FC236}">
-                <a16:creationId xmlns:a16="http://schemas.microsoft.com/office/drawing/2014/main" id="{CA5AC7F9-1DAC-33EC-9E35-8F7678422936}"/>
-              </a:ext>
-            </a:extLst>
-          </p:cNvPr>
-          <p:cNvCxnSpPr>
-            <a:cxnSpLocks/>
-            <a:stCxn id="26" idx="2"/>
-            <a:endCxn id="28" idx="0"/>
-          </p:cNvCxnSpPr>
-          <p:nvPr/>
-        </p:nvCxnSpPr>
-        <p:spPr>
-          <a:xfrm>
-            <a:off x="1947672" y="1836313"/>
-            <a:ext cx="0" cy="368284"/>
-          </a:xfrm>
-          <a:prstGeom prst="straightConnector1">
-            <a:avLst/>
-          </a:prstGeom>
-          <a:ln>
-            <a:tailEnd type="triangle"/>
-          </a:ln>
-        </p:spPr>
-        <p:style>
-          <a:lnRef idx="2">
-            <a:schemeClr val="accent2"/>
-          </a:lnRef>
-          <a:fillRef idx="0">
-            <a:schemeClr val="accent2"/>
-          </a:fillRef>
-          <a:effectRef idx="1">
-            <a:schemeClr val="accent2"/>
-          </a:effectRef>
-          <a:fontRef idx="minor">
-            <a:schemeClr val="tx1"/>
-          </a:fontRef>
-        </p:style>
-      </p:cxnSp>
-      <p:cxnSp>
-        <p:nvCxnSpPr>
-          <p:cNvPr id="33" name="Straight Arrow Connector 32">
-            <a:extLst>
-              <a:ext uri="{FF2B5EF4-FFF2-40B4-BE49-F238E27FC236}">
-                <a16:creationId xmlns:a16="http://schemas.microsoft.com/office/drawing/2014/main" id="{65A88F73-DAE7-ED43-B09A-74651A9FE4F1}"/>
-              </a:ext>
-            </a:extLst>
-          </p:cNvPr>
-          <p:cNvCxnSpPr>
-            <a:cxnSpLocks/>
-            <a:stCxn id="28" idx="2"/>
-            <a:endCxn id="3" idx="0"/>
-          </p:cNvCxnSpPr>
-          <p:nvPr/>
-        </p:nvCxnSpPr>
-        <p:spPr>
-          <a:xfrm>
-            <a:off x="1947672" y="2716661"/>
-            <a:ext cx="0" cy="450735"/>
-          </a:xfrm>
-          <a:prstGeom prst="straightConnector1">
-            <a:avLst/>
-          </a:prstGeom>
-          <a:ln>
-            <a:tailEnd type="triangle"/>
-          </a:ln>
-        </p:spPr>
-        <p:style>
-          <a:lnRef idx="2">
-            <a:schemeClr val="accent2"/>
-          </a:lnRef>
-          <a:fillRef idx="0">
-            <a:schemeClr val="accent2"/>
-          </a:fillRef>
-          <a:effectRef idx="1">
-            <a:schemeClr val="accent2"/>
-          </a:effectRef>
-          <a:fontRef idx="minor">
-            <a:schemeClr val="tx1"/>
-          </a:fontRef>
-        </p:style>
-      </p:cxnSp>
-      <p:cxnSp>
-        <p:nvCxnSpPr>
-          <p:cNvPr id="36" name="Straight Arrow Connector 35">
-            <a:extLst>
-              <a:ext uri="{FF2B5EF4-FFF2-40B4-BE49-F238E27FC236}">
-                <a16:creationId xmlns:a16="http://schemas.microsoft.com/office/drawing/2014/main" id="{85CA7AF7-ECFB-C081-ED1D-CB2CA19B35DA}"/>
-              </a:ext>
-            </a:extLst>
-          </p:cNvPr>
-          <p:cNvCxnSpPr>
-            <a:cxnSpLocks/>
-            <a:stCxn id="26" idx="3"/>
-            <a:endCxn id="27" idx="1"/>
-          </p:cNvCxnSpPr>
-          <p:nvPr/>
-        </p:nvCxnSpPr>
-        <p:spPr>
-          <a:xfrm flipV="1">
-            <a:off x="2999232" y="1547539"/>
-            <a:ext cx="777240" cy="32742"/>
-          </a:xfrm>
-          <a:prstGeom prst="straightConnector1">
-            <a:avLst/>
-          </a:prstGeom>
-          <a:ln>
-            <a:tailEnd type="triangle"/>
-          </a:ln>
-        </p:spPr>
-        <p:style>
-          <a:lnRef idx="2">
-            <a:schemeClr val="accent2"/>
-          </a:lnRef>
-          <a:fillRef idx="0">
-            <a:schemeClr val="accent2"/>
-          </a:fillRef>
-          <a:effectRef idx="1">
-            <a:schemeClr val="accent2"/>
-          </a:effectRef>
-          <a:fontRef idx="minor">
-            <a:schemeClr val="tx1"/>
-          </a:fontRef>
-        </p:style>
-      </p:cxnSp>
-      <p:cxnSp>
-        <p:nvCxnSpPr>
-          <p:cNvPr id="39" name="Straight Arrow Connector 38">
-            <a:extLst>
-              <a:ext uri="{FF2B5EF4-FFF2-40B4-BE49-F238E27FC236}">
-                <a16:creationId xmlns:a16="http://schemas.microsoft.com/office/drawing/2014/main" id="{034C77C5-6FE6-5757-EE59-5D1A19D940D6}"/>
-              </a:ext>
-            </a:extLst>
-          </p:cNvPr>
-          <p:cNvCxnSpPr>
-            <a:cxnSpLocks/>
-            <a:stCxn id="27" idx="3"/>
-            <a:endCxn id="24" idx="0"/>
-          </p:cNvCxnSpPr>
-          <p:nvPr/>
-        </p:nvCxnSpPr>
-        <p:spPr>
-          <a:xfrm>
-            <a:off x="5879592" y="1547539"/>
-            <a:ext cx="1746504" cy="721973"/>
-          </a:xfrm>
-          <a:prstGeom prst="straightConnector1">
-            <a:avLst/>
-          </a:prstGeom>
-          <a:ln>
-            <a:tailEnd type="triangle"/>
-          </a:ln>
-        </p:spPr>
-        <p:style>
-          <a:lnRef idx="2">
-            <a:schemeClr val="accent2"/>
-          </a:lnRef>
-          <a:fillRef idx="0">
-            <a:schemeClr val="accent2"/>
-          </a:fillRef>
-          <a:effectRef idx="1">
-            <a:schemeClr val="accent2"/>
-          </a:effectRef>
-          <a:fontRef idx="minor">
-            <a:schemeClr val="tx1"/>
-          </a:fontRef>
-        </p:style>
-      </p:cxnSp>
-      <p:cxnSp>
-        <p:nvCxnSpPr>
-          <p:cNvPr id="42" name="Straight Arrow Connector 41">
-            <a:extLst>
-              <a:ext uri="{FF2B5EF4-FFF2-40B4-BE49-F238E27FC236}">
-                <a16:creationId xmlns:a16="http://schemas.microsoft.com/office/drawing/2014/main" id="{FA3406C4-0A36-61E2-7A58-B5776140CE9D}"/>
-              </a:ext>
-            </a:extLst>
-          </p:cNvPr>
-          <p:cNvCxnSpPr>
-            <a:cxnSpLocks/>
-            <a:stCxn id="9" idx="3"/>
-            <a:endCxn id="24" idx="1"/>
-          </p:cNvCxnSpPr>
-          <p:nvPr/>
-        </p:nvCxnSpPr>
-        <p:spPr>
-          <a:xfrm flipV="1">
-            <a:off x="5769864" y="2416814"/>
-            <a:ext cx="1112667" cy="435745"/>
-          </a:xfrm>
-          <a:prstGeom prst="straightConnector1">
-            <a:avLst/>
-          </a:prstGeom>
-          <a:ln>
-            <a:tailEnd type="triangle"/>
-          </a:ln>
-        </p:spPr>
-        <p:style>
-          <a:lnRef idx="2">
-            <a:schemeClr val="accent2"/>
-          </a:lnRef>
-          <a:fillRef idx="0">
-            <a:schemeClr val="accent2"/>
-          </a:fillRef>
-          <a:effectRef idx="1">
-            <a:schemeClr val="accent2"/>
-          </a:effectRef>
-          <a:fontRef idx="minor">
-            <a:schemeClr val="tx1"/>
-          </a:fontRef>
-        </p:style>
-      </p:cxnSp>
       <p:cxnSp>
         <p:nvCxnSpPr>
           <p:cNvPr id="44" name="Straight Arrow Connector 43">
@@ -4286,58 +3618,14 @@
           </p:cNvPr>
           <p:cNvCxnSpPr>
             <a:cxnSpLocks/>
-            <a:stCxn id="7" idx="3"/>
             <a:endCxn id="24" idx="2"/>
           </p:cNvCxnSpPr>
           <p:nvPr/>
         </p:nvCxnSpPr>
         <p:spPr>
-          <a:xfrm flipV="1">
-            <a:off x="5879592" y="2772432"/>
-            <a:ext cx="694944" cy="1298958"/>
-          </a:xfrm>
-          <a:prstGeom prst="straightConnector1">
-            <a:avLst/>
-          </a:prstGeom>
-          <a:ln>
-            <a:tailEnd type="triangle"/>
-          </a:ln>
-        </p:spPr>
-        <p:style>
-          <a:lnRef idx="2">
-            <a:schemeClr val="accent2"/>
-          </a:lnRef>
-          <a:fillRef idx="0">
-            <a:schemeClr val="accent2"/>
-          </a:fillRef>
-          <a:effectRef idx="1">
-            <a:schemeClr val="accent2"/>
-          </a:effectRef>
-          <a:fontRef idx="minor">
-            <a:schemeClr val="tx1"/>
-          </a:fontRef>
-        </p:style>
-      </p:cxnSp>
-      <p:cxnSp>
-        <p:nvCxnSpPr>
-          <p:cNvPr id="46" name="Straight Arrow Connector 45">
-            <a:extLst>
-              <a:ext uri="{FF2B5EF4-FFF2-40B4-BE49-F238E27FC236}">
-                <a16:creationId xmlns:a16="http://schemas.microsoft.com/office/drawing/2014/main" id="{B28AB6EB-A84D-2CCF-DF2E-F9137E20A8A8}"/>
-              </a:ext>
-            </a:extLst>
-          </p:cNvPr>
-          <p:cNvCxnSpPr>
-            <a:cxnSpLocks/>
-            <a:stCxn id="8" idx="3"/>
-            <a:endCxn id="24" idx="3"/>
-          </p:cNvCxnSpPr>
-          <p:nvPr/>
-        </p:nvCxnSpPr>
-        <p:spPr>
-          <a:xfrm flipV="1">
-            <a:off x="5769864" y="3128050"/>
-            <a:ext cx="1112667" cy="2304748"/>
+          <a:xfrm flipH="1" flipV="1">
+            <a:off x="6601968" y="3061079"/>
+            <a:ext cx="61697" cy="3222514"/>
           </a:xfrm>
           <a:prstGeom prst="straightConnector1">
             <a:avLst/>
@@ -4468,7 +3756,7 @@
         </p:nvCxnSpPr>
         <p:spPr>
           <a:xfrm>
-            <a:off x="7626096" y="3275352"/>
+            <a:off x="7653528" y="5173843"/>
             <a:ext cx="0" cy="355618"/>
           </a:xfrm>
           <a:prstGeom prst="straightConnector1">
@@ -4507,7 +3795,7 @@
         </p:nvSpPr>
         <p:spPr>
           <a:xfrm>
-            <a:off x="7220711" y="3600937"/>
+            <a:off x="8217407" y="381248"/>
             <a:ext cx="3788663" cy="355615"/>
           </a:xfrm>
           <a:prstGeom prst="rect">
@@ -4570,7 +3858,7 @@
         </p:blipFill>
         <p:spPr>
           <a:xfrm>
-            <a:off x="6752844" y="3956552"/>
+            <a:off x="7051469" y="4515245"/>
             <a:ext cx="5312822" cy="2634088"/>
           </a:xfrm>
           <a:prstGeom prst="rect">
@@ -4578,6 +3866,420 @@
           </a:prstGeom>
         </p:spPr>
       </p:pic>
+      <p:sp>
+        <p:nvSpPr>
+          <p:cNvPr id="22" name="Arrow: Right 21">
+            <a:extLst>
+              <a:ext uri="{FF2B5EF4-FFF2-40B4-BE49-F238E27FC236}">
+                <a16:creationId xmlns:a16="http://schemas.microsoft.com/office/drawing/2014/main" id="{70172962-DD91-3F02-A92A-1A0B056B0C19}"/>
+              </a:ext>
+            </a:extLst>
+          </p:cNvPr>
+          <p:cNvSpPr/>
+          <p:nvPr/>
+        </p:nvSpPr>
+        <p:spPr>
+          <a:xfrm>
+            <a:off x="2999232" y="1225421"/>
+            <a:ext cx="2039112" cy="570869"/>
+          </a:xfrm>
+          <a:prstGeom prst="rightArrow">
+            <a:avLst/>
+          </a:prstGeom>
+        </p:spPr>
+        <p:style>
+          <a:lnRef idx="2">
+            <a:schemeClr val="accent2">
+              <a:shade val="15000"/>
+            </a:schemeClr>
+          </a:lnRef>
+          <a:fillRef idx="1">
+            <a:schemeClr val="accent2"/>
+          </a:fillRef>
+          <a:effectRef idx="0">
+            <a:schemeClr val="accent2"/>
+          </a:effectRef>
+          <a:fontRef idx="minor">
+            <a:schemeClr val="lt1"/>
+          </a:fontRef>
+        </p:style>
+        <p:txBody>
+          <a:bodyPr rtlCol="0" anchor="ctr"/>
+          <a:lstStyle/>
+          <a:p>
+            <a:pPr algn="ctr"/>
+            <a:endParaRPr lang="en-US" dirty="0"/>
+          </a:p>
+        </p:txBody>
+      </p:sp>
+      <p:sp>
+        <p:nvSpPr>
+          <p:cNvPr id="25" name="TextBox 24">
+            <a:extLst>
+              <a:ext uri="{FF2B5EF4-FFF2-40B4-BE49-F238E27FC236}">
+                <a16:creationId xmlns:a16="http://schemas.microsoft.com/office/drawing/2014/main" id="{6230CC0F-7DB1-5436-3D3D-2C53A1AE60A5}"/>
+              </a:ext>
+            </a:extLst>
+          </p:cNvPr>
+          <p:cNvSpPr txBox="1"/>
+          <p:nvPr/>
+        </p:nvSpPr>
+        <p:spPr>
+          <a:xfrm>
+            <a:off x="3040880" y="1002054"/>
+            <a:ext cx="1678729" cy="369332"/>
+          </a:xfrm>
+          <a:prstGeom prst="rect">
+            <a:avLst/>
+          </a:prstGeom>
+          <a:noFill/>
+        </p:spPr>
+        <p:txBody>
+          <a:bodyPr wrap="none" rtlCol="0">
+            <a:spAutoFit/>
+          </a:bodyPr>
+          <a:lstStyle/>
+          <a:p>
+            <a:r>
+              <a:rPr lang="en-US" dirty="0"/>
+              <a:t>Water Demand</a:t>
+            </a:r>
+          </a:p>
+        </p:txBody>
+      </p:sp>
+      <p:sp>
+        <p:nvSpPr>
+          <p:cNvPr id="30" name="TextBox 29">
+            <a:extLst>
+              <a:ext uri="{FF2B5EF4-FFF2-40B4-BE49-F238E27FC236}">
+                <a16:creationId xmlns:a16="http://schemas.microsoft.com/office/drawing/2014/main" id="{CE132634-8343-274F-C819-4F54570F068A}"/>
+              </a:ext>
+            </a:extLst>
+          </p:cNvPr>
+          <p:cNvSpPr txBox="1"/>
+          <p:nvPr/>
+        </p:nvSpPr>
+        <p:spPr>
+          <a:xfrm>
+            <a:off x="2101229" y="2069884"/>
+            <a:ext cx="898003" cy="646331"/>
+          </a:xfrm>
+          <a:prstGeom prst="rect">
+            <a:avLst/>
+          </a:prstGeom>
+          <a:noFill/>
+        </p:spPr>
+        <p:txBody>
+          <a:bodyPr wrap="none" rtlCol="0">
+            <a:spAutoFit/>
+          </a:bodyPr>
+          <a:lstStyle/>
+          <a:p>
+            <a:r>
+              <a:rPr lang="en-US" dirty="0"/>
+              <a:t>Water </a:t>
+            </a:r>
+          </a:p>
+          <a:p>
+            <a:r>
+              <a:rPr lang="en-US" dirty="0"/>
+              <a:t>Quality</a:t>
+            </a:r>
+          </a:p>
+        </p:txBody>
+      </p:sp>
+      <p:sp>
+        <p:nvSpPr>
+          <p:cNvPr id="31" name="Arrow: Right 30">
+            <a:extLst>
+              <a:ext uri="{FF2B5EF4-FFF2-40B4-BE49-F238E27FC236}">
+                <a16:creationId xmlns:a16="http://schemas.microsoft.com/office/drawing/2014/main" id="{F47735B2-23A4-C667-0F2C-9D887E612D07}"/>
+              </a:ext>
+            </a:extLst>
+          </p:cNvPr>
+          <p:cNvSpPr/>
+          <p:nvPr/>
+        </p:nvSpPr>
+        <p:spPr>
+          <a:xfrm rot="5400000">
+            <a:off x="1255476" y="2170692"/>
+            <a:ext cx="1417183" cy="570869"/>
+          </a:xfrm>
+          <a:prstGeom prst="rightArrow">
+            <a:avLst/>
+          </a:prstGeom>
+        </p:spPr>
+        <p:style>
+          <a:lnRef idx="2">
+            <a:schemeClr val="accent2">
+              <a:shade val="15000"/>
+            </a:schemeClr>
+          </a:lnRef>
+          <a:fillRef idx="1">
+            <a:schemeClr val="accent2"/>
+          </a:fillRef>
+          <a:effectRef idx="0">
+            <a:schemeClr val="accent2"/>
+          </a:effectRef>
+          <a:fontRef idx="minor">
+            <a:schemeClr val="lt1"/>
+          </a:fontRef>
+        </p:style>
+        <p:txBody>
+          <a:bodyPr rtlCol="0" anchor="ctr"/>
+          <a:lstStyle/>
+          <a:p>
+            <a:pPr algn="ctr"/>
+            <a:endParaRPr lang="en-US" dirty="0"/>
+          </a:p>
+        </p:txBody>
+      </p:sp>
+      <p:sp>
+        <p:nvSpPr>
+          <p:cNvPr id="32" name="TextBox 31">
+            <a:extLst>
+              <a:ext uri="{FF2B5EF4-FFF2-40B4-BE49-F238E27FC236}">
+                <a16:creationId xmlns:a16="http://schemas.microsoft.com/office/drawing/2014/main" id="{6684971F-867B-4142-5669-745D93C6DDF9}"/>
+              </a:ext>
+            </a:extLst>
+          </p:cNvPr>
+          <p:cNvSpPr txBox="1"/>
+          <p:nvPr/>
+        </p:nvSpPr>
+        <p:spPr>
+          <a:xfrm>
+            <a:off x="3754020" y="2635520"/>
+            <a:ext cx="1660839" cy="369332"/>
+          </a:xfrm>
+          <a:prstGeom prst="rect">
+            <a:avLst/>
+          </a:prstGeom>
+          <a:noFill/>
+        </p:spPr>
+        <p:txBody>
+          <a:bodyPr wrap="none" rtlCol="0">
+            <a:spAutoFit/>
+          </a:bodyPr>
+          <a:lstStyle/>
+          <a:p>
+            <a:r>
+              <a:rPr lang="en-US" dirty="0"/>
+              <a:t>Treatment SEC</a:t>
+            </a:r>
+          </a:p>
+        </p:txBody>
+      </p:sp>
+      <p:sp>
+        <p:nvSpPr>
+          <p:cNvPr id="34" name="Arrow: Right 33">
+            <a:extLst>
+              <a:ext uri="{FF2B5EF4-FFF2-40B4-BE49-F238E27FC236}">
+                <a16:creationId xmlns:a16="http://schemas.microsoft.com/office/drawing/2014/main" id="{EAA8D3AA-841C-8C3D-0DA5-74F301E46FF5}"/>
+              </a:ext>
+            </a:extLst>
+          </p:cNvPr>
+          <p:cNvSpPr/>
+          <p:nvPr/>
+        </p:nvSpPr>
+        <p:spPr>
+          <a:xfrm>
+            <a:off x="3013735" y="2864382"/>
+            <a:ext cx="3227832" cy="570869"/>
+          </a:xfrm>
+          <a:prstGeom prst="rightArrow">
+            <a:avLst/>
+          </a:prstGeom>
+        </p:spPr>
+        <p:style>
+          <a:lnRef idx="2">
+            <a:schemeClr val="accent2">
+              <a:shade val="15000"/>
+            </a:schemeClr>
+          </a:lnRef>
+          <a:fillRef idx="1">
+            <a:schemeClr val="accent2"/>
+          </a:fillRef>
+          <a:effectRef idx="0">
+            <a:schemeClr val="accent2"/>
+          </a:effectRef>
+          <a:fontRef idx="minor">
+            <a:schemeClr val="lt1"/>
+          </a:fontRef>
+        </p:style>
+        <p:txBody>
+          <a:bodyPr rtlCol="0" anchor="ctr"/>
+          <a:lstStyle/>
+          <a:p>
+            <a:pPr algn="ctr"/>
+            <a:endParaRPr lang="en-US" dirty="0"/>
+          </a:p>
+        </p:txBody>
+      </p:sp>
+      <p:sp>
+        <p:nvSpPr>
+          <p:cNvPr id="35" name="Arrow: Right 34">
+            <a:extLst>
+              <a:ext uri="{FF2B5EF4-FFF2-40B4-BE49-F238E27FC236}">
+                <a16:creationId xmlns:a16="http://schemas.microsoft.com/office/drawing/2014/main" id="{2A28C7E8-1D07-15DE-55F1-84BBED39D311}"/>
+              </a:ext>
+            </a:extLst>
+          </p:cNvPr>
+          <p:cNvSpPr/>
+          <p:nvPr/>
+        </p:nvSpPr>
+        <p:spPr>
+          <a:xfrm>
+            <a:off x="3016243" y="3414640"/>
+            <a:ext cx="3227832" cy="1566895"/>
+          </a:xfrm>
+          <a:prstGeom prst="rightArrow">
+            <a:avLst>
+              <a:gd name="adj1" fmla="val 100000"/>
+              <a:gd name="adj2" fmla="val 53198"/>
+            </a:avLst>
+          </a:prstGeom>
+        </p:spPr>
+        <p:style>
+          <a:lnRef idx="2">
+            <a:schemeClr val="accent2">
+              <a:shade val="15000"/>
+            </a:schemeClr>
+          </a:lnRef>
+          <a:fillRef idx="1">
+            <a:schemeClr val="accent2"/>
+          </a:fillRef>
+          <a:effectRef idx="0">
+            <a:schemeClr val="accent2"/>
+          </a:effectRef>
+          <a:fontRef idx="minor">
+            <a:schemeClr val="lt1"/>
+          </a:fontRef>
+        </p:style>
+        <p:txBody>
+          <a:bodyPr rtlCol="0" anchor="ctr"/>
+          <a:lstStyle/>
+          <a:p>
+            <a:pPr algn="ctr"/>
+            <a:endParaRPr lang="en-US" dirty="0"/>
+          </a:p>
+        </p:txBody>
+      </p:sp>
+      <p:sp>
+        <p:nvSpPr>
+          <p:cNvPr id="45" name="TextBox 44">
+            <a:extLst>
+              <a:ext uri="{FF2B5EF4-FFF2-40B4-BE49-F238E27FC236}">
+                <a16:creationId xmlns:a16="http://schemas.microsoft.com/office/drawing/2014/main" id="{170C9D01-6C2B-C2E5-AF07-6DF63B4B2DDC}"/>
+              </a:ext>
+            </a:extLst>
+          </p:cNvPr>
+          <p:cNvSpPr txBox="1"/>
+          <p:nvPr/>
+        </p:nvSpPr>
+        <p:spPr>
+          <a:xfrm>
+            <a:off x="3754020" y="5386620"/>
+            <a:ext cx="1535228" cy="369332"/>
+          </a:xfrm>
+          <a:prstGeom prst="rect">
+            <a:avLst/>
+          </a:prstGeom>
+          <a:noFill/>
+        </p:spPr>
+        <p:txBody>
+          <a:bodyPr wrap="none" rtlCol="0">
+            <a:spAutoFit/>
+          </a:bodyPr>
+          <a:lstStyle/>
+          <a:p>
+            <a:r>
+              <a:rPr lang="en-US" dirty="0"/>
+              <a:t>Energy Profile</a:t>
+            </a:r>
+          </a:p>
+        </p:txBody>
+      </p:sp>
+      <p:sp>
+        <p:nvSpPr>
+          <p:cNvPr id="48" name="Arrow: Right 47">
+            <a:extLst>
+              <a:ext uri="{FF2B5EF4-FFF2-40B4-BE49-F238E27FC236}">
+                <a16:creationId xmlns:a16="http://schemas.microsoft.com/office/drawing/2014/main" id="{439B80F8-8BFC-0571-99F0-13F36EB757BB}"/>
+              </a:ext>
+            </a:extLst>
+          </p:cNvPr>
+          <p:cNvSpPr/>
+          <p:nvPr/>
+        </p:nvSpPr>
+        <p:spPr>
+          <a:xfrm>
+            <a:off x="2999232" y="4995327"/>
+            <a:ext cx="3227832" cy="570869"/>
+          </a:xfrm>
+          <a:prstGeom prst="rightArrow">
+            <a:avLst/>
+          </a:prstGeom>
+        </p:spPr>
+        <p:style>
+          <a:lnRef idx="2">
+            <a:schemeClr val="accent2">
+              <a:shade val="15000"/>
+            </a:schemeClr>
+          </a:lnRef>
+          <a:fillRef idx="1">
+            <a:schemeClr val="accent2"/>
+          </a:fillRef>
+          <a:effectRef idx="0">
+            <a:schemeClr val="accent2"/>
+          </a:effectRef>
+          <a:fontRef idx="minor">
+            <a:schemeClr val="lt1"/>
+          </a:fontRef>
+        </p:style>
+        <p:txBody>
+          <a:bodyPr rtlCol="0" anchor="ctr"/>
+          <a:lstStyle/>
+          <a:p>
+            <a:pPr algn="ctr"/>
+            <a:endParaRPr lang="en-US" dirty="0"/>
+          </a:p>
+        </p:txBody>
+      </p:sp>
+      <p:sp>
+        <p:nvSpPr>
+          <p:cNvPr id="49" name="TextBox 48">
+            <a:extLst>
+              <a:ext uri="{FF2B5EF4-FFF2-40B4-BE49-F238E27FC236}">
+                <a16:creationId xmlns:a16="http://schemas.microsoft.com/office/drawing/2014/main" id="{49694992-4F64-F308-F50B-B5FA99C7A77E}"/>
+              </a:ext>
+            </a:extLst>
+          </p:cNvPr>
+          <p:cNvSpPr txBox="1"/>
+          <p:nvPr/>
+        </p:nvSpPr>
+        <p:spPr>
+          <a:xfrm>
+            <a:off x="3323057" y="3923300"/>
+            <a:ext cx="1900136" cy="369332"/>
+          </a:xfrm>
+          <a:prstGeom prst="rect">
+            <a:avLst/>
+          </a:prstGeom>
+          <a:noFill/>
+        </p:spPr>
+        <p:txBody>
+          <a:bodyPr wrap="none" rtlCol="0">
+            <a:spAutoFit/>
+          </a:bodyPr>
+          <a:lstStyle/>
+          <a:p>
+            <a:r>
+              <a:rPr lang="en-US" dirty="0"/>
+              <a:t>CAPEX and OPEX</a:t>
+            </a:r>
+          </a:p>
+        </p:txBody>
+      </p:sp>
     </p:spTree>
     <p:extLst>
       <p:ext uri="{BB962C8B-B14F-4D97-AF65-F5344CB8AC3E}">
